--- a/slides/module7.pptx
+++ b/slides/module7.pptx
@@ -3928,7 +3928,7 @@
                 </a:solidFill>
                 <a:latin typeface="Arial"/>
               </a:rPr>
-              <a:t>How we know where anything is up there — and why distance is brutal.</a:t>
+              <a:t>How we actually see satellites — and why distance is brutal.</a:t>
             </a:r>
           </a:p>
         </p:txBody>
